--- a/Slides/Semana 8/semana_8_slides.pptx
+++ b/Slides/Semana 8/semana_8_slides.pptx
@@ -22,10 +22,9 @@
     <p:sldId id="270" r:id="rId16"/>
     <p:sldId id="271" r:id="rId17"/>
     <p:sldId id="272" r:id="rId18"/>
-    <p:sldId id="273" r:id="rId19"/>
   </p:sldIdLst>
   <p:notesMasterIdLst>
-    <p:notesMasterId r:id="rId20"/>
+    <p:notesMasterId r:id="rId19"/>
   </p:notesMasterIdLst>
   <p:sldSz cx="12192000" cy="6858000"/>
   <p:notesSz cx="6858000" cy="12192000"/>
@@ -519,7 +518,7 @@
           <a:p>
             <a:r>
               <a:rPr lang="en-US" dirty="0"/>
-              <a:t>Notas: Abertura da mini aula (20 min). Terceira Crítica Formal do semestre (CF3) — encerra a Unidade II. Mensagem central: até a Semana 7, o material vivia dentro do Blender como rede de nós procedurais. Hoje os estudantes cruzam para uma ferramenta dedicada de texturização — o 3D Coat — onde o material passa a ser pintado, canal por canal, e exportado como imagens reais (PNG). Manter o ritmo: os canais PBR já são conhecidos desde a Semana 5, o foco de hoje é a ferramenta e o fluxo, não os conceitos.</a:t>
+              <a:t>Notas: Abertura da mini aula (20 min). Esta é a segunda Crítica Formal do semestre (CF2) — após a Semana 4 — e encerra a Unidade II. Mensagem central: a Semana 7 já fez a migração completa para o 3D Coat e já deu ao Asset 01 profundidade real via bake de AO/Curvature e Normal pintado no canal Depth. Hoje não se reintroduz a ferramenta — aprofunda-se o que já está em andamento: mais controle de camada, o canal Metallic, e o fechamento com a exportação dos quatro mapas PBR (Albedo, Metallic, Roughness e Normal, todos vindos do 3D Coat), reconectados no Blender sem nenhum nó procedural remanescente.</a:t>
             </a:r>
             <a:endParaRPr lang="en-US" dirty="0"/>
           </a:p>
@@ -607,7 +606,7 @@
           <a:p>
             <a:r>
               <a:rPr lang="en-US" dirty="0"/>
-              <a:t>Notas: Etapa 3 do estúdio. A camada de variação é o que evita o "look" de cor sólida perfeita — nenhuma superfície real é assim. Pedra: cinza; madeira: marrom; metal: cinza escuro frio. Adaptar ao tema do kit de cada estudante.</a:t>
+              <a:t>Notas: Passo 2 da demonstração / Etapa 2 do Estúdio 1. Para a maioria dos kits (Medieval, Fantasia, pós-apocalíptico), pedra, madeira e concreto ficam em Metallic 0 sem exceção. Reservar o Metallic 1 apenas para metal exposto, com preto pintado nas áreas de ferrugem ou tinta usando a máscara de Curvature como guia.</a:t>
             </a:r>
             <a:endParaRPr lang="en-US" dirty="0"/>
           </a:p>
@@ -695,7 +694,7 @@
           <a:p>
             <a:r>
               <a:rPr lang="en-US" dirty="0"/>
-              <a:t>Notas: Etapa 4. Pedra e madeira não-polidas ficam em torno de 0.6-0.8 na base. As arestas e pontos de contato mais usados recebem roughness mais baixo — reflexo do desgaste físico por uso. Esse é o mesmo raciocínio de "onde a luz revela a história do objeto" que retorna nas Semanas 9-10.</a:t>
+              <a:t>Notas: Passo 3 da demonstração / Etapa 3 do Estúdio 1. No Encontro 2, esta revisão pode ganhar uma camada adicional `Roughness_Sujeira` (Multiply, 40–50%, pintada em áreas côncavas com valor mais alto) para incorporar o feedback da crítica formal.</a:t>
             </a:r>
             <a:endParaRPr lang="en-US" dirty="0"/>
           </a:p>
@@ -783,7 +782,7 @@
           <a:p>
             <a:r>
               <a:rPr lang="en-US" dirty="0"/>
-              <a:t>Notas: Etapa 5. Para a maioria dos kits (Medieval, Fantasia, pós-apocalíptico), pedra e madeira ficam em Metallic 0 sem pintura adicional. Reservar o Metallic 1 apenas para metal exposto, com preto pintado nas áreas de ferrugem ou tinta.</a:t>
+              <a:t>Notas: Passo 4 e 5 da demonstração. Regra fixa a repetir sempre: só o Albedo fica em sRGB; todo mapa de DADO (Roughness, Metallic, Normal) vai em Non-Color. O nó Normal Map é obrigatório entre o Image Texture do Normal e o Principled BSDF — é um erro silencioso, o material roda sem erro mas com aparência errada.</a:t>
             </a:r>
             <a:endParaRPr lang="en-US" dirty="0"/>
           </a:p>
@@ -871,7 +870,7 @@
           <a:p>
             <a:r>
               <a:rPr lang="en-US" dirty="0"/>
-              <a:t>Notas: Passo final do fluxo. Regra fixa a repetir sempre: só o Albedo fica em sRGB; todo mapa de DADO (Roughness, Metallic, Normal, AO) vai em Non-Color. Manter o Normal Map procedural da Semana 7 conectado — o 3D Coat ainda não gerou Normal Map nesta semana (isso vem no bake, Semana 11).</a:t>
+              <a:t>Notas: Alinhado às Possíveis Dificuldades do plano de aula. Circular no estúdio caçando exatamente estes três padrões, e um quarto ponto de checagem: os quatro mapas foram de fato exportados, conferindo no explorador de arquivos — não só na confirmação do 3D Coat.</a:t>
             </a:r>
             <a:endParaRPr lang="en-US" dirty="0"/>
           </a:p>
@@ -959,7 +958,7 @@
           <a:p>
             <a:r>
               <a:rPr lang="en-US" dirty="0"/>
-              <a:t>Notas: Os três erros mais frequentes da semana, alinhados às Possíveis Dificuldades do plano de aula. Circular no estúdio caçando exatamente estes padrões: conferir o indicador de canal ativo, abrir o Render Room isolando o Roughness, e verificar as ilhas de UV no UV Room se a malha aparecer estranha.</a:t>
+              <a:t>Notas: Contextualizar o valor profissional. Amarra à Semana 16, onde o mesmo tipo de inversão de canal (Roughness vs. Smoothness) reaparece na Unity.</a:t>
             </a:r>
             <a:endParaRPr lang="en-US" dirty="0"/>
           </a:p>
@@ -1047,7 +1046,7 @@
           <a:p>
             <a:r>
               <a:rPr lang="en-US" dirty="0"/>
-              <a:t>Notas: Contextualizar o valor profissional. O primeiro contato com uma ferramenta de pintura PBR dedicada (3D Coat) é um marco real de carreira — é a mesma ferramenta (ou concorrente direta) usada em produção. Amarra à Semana 16, onde o mesmo tipo de inversão de canal (Roughness vs. Smoothness) reaparece na Unity.</a:t>
+              <a:t>Notas: Amarrar a mini aula antes da demonstração. Hoje é a segunda Crítica Formal do semestre (CF2) — após a Semana 4 — e encerra a Unidade II. O objeto da crítica é o trabalho das Semanas 6–7 consolidado; o refinamento feito no Estúdio 1 pode entrar como contexto, mas o foco avaliativo é o estado consolidado do material nas duas trilhas visuais (fotorrealista e estilizada).</a:t>
             </a:r>
             <a:endParaRPr lang="en-US" dirty="0"/>
           </a:p>
@@ -1135,7 +1134,7 @@
           <a:p>
             <a:r>
               <a:rPr lang="en-US" dirty="0"/>
-              <a:t>Notas: Amarrar a mini aula antes da demonstração. Cada item retorna na demonstração ao vivo e no estúdio. Lembrar: hoje é Crítica Formal (CF3) sobre o material das Semanas 5-7 — os primeiros resultados do 3D Coat entram só como contexto, não como foco avaliativo desta crítica.</a:t>
+              <a:t>Notas: Consigna do estúdio de 50 minutos. Não precisa ser a versão final — o Encontro 2 tem mais 60 minutos de estúdio, incluindo a reconexão completa no Blender. Nomenclatura esperada: [Nome]_Asset01_S08.3b e pasta [Nome]_Asset01_Mapas_S08/. Lembrar de distribuir a autoavaliação ao final deste encontro — é pré-requisito da crítica formal (CF2) do Encontro 2.</a:t>
             </a:r>
             <a:endParaRPr lang="en-US" dirty="0"/>
           </a:p>
@@ -1223,7 +1222,12 @@
           <a:p>
             <a:r>
               <a:rPr lang="en-US" dirty="0"/>
-              <a:t>Notas: Consigna do estúdio de 50 minutos. Não precisa estar terminado — o segundo encontro tem mais 60 minutos de estúdio. Nomenclatura esperada: [Nome]_Asset01_S08.3b. Lembrar de distribuir a autoavaliação ao final deste encontro — é pré-requisito da crítica formal do Encontro 2.</a:t>
+              <a:t>Notas: Transição para a demonstração de 20 min. Sequência: abrir o arquivo de demonstração da Semana 7 → refinar Color com camada de detalhe → preencher Metallic (pedra = preto, metal = branco com ferrugem) → revisar Roughness combinado → exportar os quatro mapas → conectar no Blender (quatro Image Texture + nó Normal Map) e comparar com o estado anterior.
+[!FIGURA]
+Objetivo didático: antecipar o layout de tela da demonstração para que a turma acompanhe a comparação entre refinamento no 3D Coat e reconexão no Blender.
+Arquivo sugerido: assets/demo_3dcoat_pipeline.webp
+Descrição: tela dividida. À esquerda, o Paint Room do 3D Coat com o painel de Layers visível (camadas Base_Color, Detalhe_Cor, Metallic, Roughness base/desgaste/sujeira) sobre um asset de parede de pedra. À direita, o Shader Editor do Blender com quatro nós Image Texture (Albedo, Roughness, Metallic, Normal), o nó Normal Map, e o Viewport Rendered mostrando o resultado final.
+Como produzir: no 3D Coat, montar as camadas citadas em um asset de demonstração e capturar o Paint Room com o painel de Layers aberto; no Blender, montar o node tree com os quatro Image Texture + Normal Map + Principled BSDF. Compor as duas capturas no Krita.</a:t>
             </a:r>
             <a:endParaRPr lang="en-US" dirty="0"/>
           </a:p>
@@ -1265,7 +1269,7 @@
 </p:notes>
 </file>
 
-<file path=ppt/notesSlides/notesSlide18.xml><?xml version="1.0" encoding="utf-8"?>
+<file path=ppt/notesSlides/notesSlide2.xml><?xml version="1.0" encoding="utf-8"?>
 <p:notes xmlns:a="http://schemas.openxmlformats.org/drawingml/2006/main" xmlns:r="http://schemas.openxmlformats.org/officeDocument/2006/relationships" xmlns:p="http://schemas.openxmlformats.org/presentationml/2006/main">
   <p:cSld>
     <p:spTree>
@@ -1311,12 +1315,7 @@
           <a:p>
             <a:r>
               <a:rPr lang="en-US" dirty="0"/>
-              <a:t>Notas: Transição para a demonstração de 20 min. Sequência: importar asset de demonstração (parede ou caixa) → reconhecer Layers, Toolbar, canais ativos → pintar Base_Color + variação → pintar Base_Roughness + desgaste em arestas → exportar Albedo/Roughness/Metallic → conectar no Blender e comparar com o material de nós da Semana 7. Priorizar Albedo e Roughness se o tempo apertar; Metallic pode ficar como valor único no Principled BSDF.
-[!FIGURA]
-Objetivo didático: antecipar o layout de tela da demonstração para que a turma acompanhe a comparação entre as duas ferramentas.
-Arquivo sugerido: assets/demo_3dcoat_pipeline.webp
-Descrição: tela dividida. À esquerda, o Paint Room do 3D Coat com o painel de Layers visível (camadas Base_Color, Variacao_Cor, Base_Roughness, Roughness_Desgaste) sobre um asset de parede de pedra. À direita, o Shader Editor do Blender com o material da Semana 7 e o Viewport Rendered mostrando o resultado.
-Como produzir: no 3D Coat, montar as camadas citadas em um asset de demonstração e capturar o Paint Room com o painel de Layers aberto; no Blender, abrir o material de nós da Semana 7 lado a lado. Compor as duas capturas no Krita.</a:t>
+              <a:t>Notas: Ler rápido. A turma já domina a mecânica básica do 3D Coat desde a Semana 7 — esta mini-aula não reapresenta a ferramenta. O Normal Map já foi bakeado a partir do Depth pintado na Semana 7; hoje ele é exportado junto com os demais mapas pela primeira vez. O objetivo 6 (apresentação na crítica formal) fica para o Encontro 2.</a:t>
             </a:r>
             <a:endParaRPr lang="en-US" dirty="0"/>
           </a:p>
@@ -1339,7 +1338,7 @@
           <a:p>
             <a:fld id="{F7021451-1387-4CA6-816F-3879F97B5CBC}" type="slidenum">
               <a:rPr lang="en-US"/>
-              <a:t>18</a:t>
+              <a:t>2</a:t>
             </a:fld>
             <a:endParaRPr lang="en-US"/>
           </a:p>
@@ -1358,7 +1357,7 @@
 </p:notes>
 </file>
 
-<file path=ppt/notesSlides/notesSlide2.xml><?xml version="1.0" encoding="utf-8"?>
+<file path=ppt/notesSlides/notesSlide3.xml><?xml version="1.0" encoding="utf-8"?>
 <p:notes xmlns:a="http://schemas.openxmlformats.org/drawingml/2006/main" xmlns:r="http://schemas.openxmlformats.org/officeDocument/2006/relationships" xmlns:p="http://schemas.openxmlformats.org/presentationml/2006/main">
   <p:cSld>
     <p:spTree>
@@ -1404,7 +1403,7 @@
           <a:p>
             <a:r>
               <a:rPr lang="en-US" dirty="0"/>
-              <a:t>Notas: Ler rápido. Não antecipar Normal Map baked (Semana 11) nem pintura artística de desgaste (Semana 9) — hoje o 3D Coat aparece pela primeira vez, com os três canais básicos. O objetivo 5 já prepara para a demonstração e para o estúdio.</a:t>
+              <a:t>Notas: Pergunta de abertura da mini aula. Conduzir a turma a perceber que falta: (1) o Metallic, ainda não trabalhado a fundo; (2) mais uma camada de detalhe intencional sobre o que já existe; (3) a exportação de tudo isso como imagem real, incluindo o Normal pela primeira vez.</a:t>
             </a:r>
             <a:endParaRPr lang="en-US" dirty="0"/>
           </a:p>
@@ -1427,7 +1426,7 @@
           <a:p>
             <a:fld id="{F7021451-1387-4CA6-816F-3879F97B5CBC}" type="slidenum">
               <a:rPr lang="en-US"/>
-              <a:t>2</a:t>
+              <a:t>3</a:t>
             </a:fld>
             <a:endParaRPr lang="en-US"/>
           </a:p>
@@ -1446,7 +1445,7 @@
 </p:notes>
 </file>
 
-<file path=ppt/notesSlides/notesSlide3.xml><?xml version="1.0" encoding="utf-8"?>
+<file path=ppt/notesSlides/notesSlide4.xml><?xml version="1.0" encoding="utf-8"?>
 <p:notes xmlns:a="http://schemas.openxmlformats.org/drawingml/2006/main" xmlns:r="http://schemas.openxmlformats.org/officeDocument/2006/relationships" xmlns:p="http://schemas.openxmlformats.org/presentationml/2006/main">
   <p:cSld>
     <p:spTree>
@@ -1492,7 +1491,7 @@
           <a:p>
             <a:r>
               <a:rPr lang="en-US" dirty="0"/>
-              <a:t>Notas: Pergunta de abertura. Deixar a turma responder brevemente. Resposta esperada: os nós procedurais (Noise, Bump, ColorRamp) funcionam só dentro do Blender — para exportar para a Unity é preciso ter mapas de imagem reais (PNG/TGA). Confirmar e revelar: o 3D Coat é a ferramenta que gera esses mapas, pintando diretamente sobre a malha 3D.</a:t>
+              <a:t>Notas: Recapitulação rápida (1 min) — conceito já visto na Semana 7, não precisa de tempo de demonstração aqui. Serve só para reancorar por que a exportação de hoje fecha o pipeline.</a:t>
             </a:r>
             <a:endParaRPr lang="en-US" dirty="0"/>
           </a:p>
@@ -1515,7 +1514,7 @@
           <a:p>
             <a:fld id="{F7021451-1387-4CA6-816F-3879F97B5CBC}" type="slidenum">
               <a:rPr lang="en-US"/>
-              <a:t>3</a:t>
+              <a:t>4</a:t>
             </a:fld>
             <a:endParaRPr lang="en-US"/>
           </a:p>
@@ -1534,7 +1533,7 @@
 </p:notes>
 </file>
 
-<file path=ppt/notesSlides/notesSlide4.xml><?xml version="1.0" encoding="utf-8"?>
+<file path=ppt/notesSlides/notesSlide5.xml><?xml version="1.0" encoding="utf-8"?>
 <p:notes xmlns:a="http://schemas.openxmlformats.org/drawingml/2006/main" xmlns:r="http://schemas.openxmlformats.org/officeDocument/2006/relationships" xmlns:p="http://schemas.openxmlformats.org/presentationml/2006/main">
   <p:cSld>
     <p:spTree>
@@ -1580,7 +1579,7 @@
           <a:p>
             <a:r>
               <a:rPr lang="en-US" dirty="0"/>
-              <a:t>Notas: Fixar a diferença fundamental antes de qualquer detalhe de interface. Os estudantes já sabem o que Albedo, Roughness e Metallic representam desde a Semana 5 — hoje muda apenas COMO essa informação é criada e armazenada.</a:t>
+              <a:t>Notas: Recapitulação visual. O 3D Coat recebe a malha com UV do Blender e devolve mapas de imagem que representam cada canal PBR — hoje, os quatro. Esses mapas voltam ao Blender (para conferência) ou vão direto para a Unity.</a:t>
             </a:r>
             <a:endParaRPr lang="en-US" dirty="0"/>
           </a:p>
@@ -1603,7 +1602,7 @@
           <a:p>
             <a:fld id="{F7021451-1387-4CA6-816F-3879F97B5CBC}" type="slidenum">
               <a:rPr lang="en-US"/>
-              <a:t>4</a:t>
+              <a:t>5</a:t>
             </a:fld>
             <a:endParaRPr lang="en-US"/>
           </a:p>
@@ -1622,7 +1621,7 @@
 </p:notes>
 </file>
 
-<file path=ppt/notesSlides/notesSlide5.xml><?xml version="1.0" encoding="utf-8"?>
+<file path=ppt/notesSlides/notesSlide6.xml><?xml version="1.0" encoding="utf-8"?>
 <p:notes xmlns:a="http://schemas.openxmlformats.org/drawingml/2006/main" xmlns:r="http://schemas.openxmlformats.org/officeDocument/2006/relationships" xmlns:p="http://schemas.openxmlformats.org/presentationml/2006/main">
   <p:cSld>
     <p:spTree>
@@ -1668,7 +1667,7 @@
           <a:p>
             <a:r>
               <a:rPr lang="en-US" dirty="0"/>
-              <a:t>Notas: O 3D Coat recebe a malha com UV do Blender e devolve mapas de imagem que representam cada canal PBR. Esses mapas voltam ao Blender (para conferência) ou vão direto para a Unity. Reforçar: esta é a posição exata do 3D Coat no pipeline da disciplina — não substitui o Blender, entra depois do UV pronto.</a:t>
+              <a:t>Notas: A estrutura de camadas (uma camada, vários canais) já é conhecida desde a Semana 7 — hoje entra especificamente o canal Subsurface, que ainda não tinha sido ativado. Não há cobrança prática de pintura no SSS para quem não tem elemento orgânico no kit — localizar o canal na interface já é suficiente.</a:t>
             </a:r>
             <a:endParaRPr lang="en-US" dirty="0"/>
           </a:p>
@@ -1691,7 +1690,7 @@
           <a:p>
             <a:fld id="{F7021451-1387-4CA6-816F-3879F97B5CBC}" type="slidenum">
               <a:rPr lang="en-US"/>
-              <a:t>5</a:t>
+              <a:t>6</a:t>
             </a:fld>
             <a:endParaRPr lang="en-US"/>
           </a:p>
@@ -1710,7 +1709,7 @@
 </p:notes>
 </file>
 
-<file path=ppt/notesSlides/notesSlide6.xml><?xml version="1.0" encoding="utf-8"?>
+<file path=ppt/notesSlides/notesSlide7.xml><?xml version="1.0" encoding="utf-8"?>
 <p:notes xmlns:a="http://schemas.openxmlformats.org/drawingml/2006/main" xmlns:r="http://schemas.openxmlformats.org/officeDocument/2006/relationships" xmlns:p="http://schemas.openxmlformats.org/presentationml/2006/main">
   <p:cSld>
     <p:spTree>
@@ -1756,7 +1755,7 @@
           <a:p>
             <a:r>
               <a:rPr lang="en-US" dirty="0"/>
-              <a:t>Notas: O 3D Coat organiza o trabalho em "Rooms" especializadas. No workflow da disciplina, o UV Room é usado apenas para conferência — a abertura de UV acontece no Blender (Semanas 2-4). O Render Room será usado ao longo da demonstração para checar o efeito de cada camada pintada.</a:t>
+              <a:t>Notas: O refinamento desta semana consiste em ajustar o peso relativo dessas três camadas — nenhuma delas sozinha deveria contar toda a história do material. Esta é a lógica central da mini-aula, junto com o SSS.</a:t>
             </a:r>
             <a:endParaRPr lang="en-US" dirty="0"/>
           </a:p>
@@ -1779,7 +1778,7 @@
           <a:p>
             <a:fld id="{F7021451-1387-4CA6-816F-3879F97B5CBC}" type="slidenum">
               <a:rPr lang="en-US"/>
-              <a:t>6</a:t>
+              <a:t>7</a:t>
             </a:fld>
             <a:endParaRPr lang="en-US"/>
           </a:p>
@@ -1798,7 +1797,7 @@
 </p:notes>
 </file>
 
-<file path=ppt/notesSlides/notesSlide7.xml><?xml version="1.0" encoding="utf-8"?>
+<file path=ppt/notesSlides/notesSlide8.xml><?xml version="1.0" encoding="utf-8"?>
 <p:notes xmlns:a="http://schemas.openxmlformats.org/drawingml/2006/main" xmlns:r="http://schemas.openxmlformats.org/officeDocument/2006/relationships" xmlns:p="http://schemas.openxmlformats.org/presentationml/2006/main">
   <p:cSld>
     <p:spTree>
@@ -1844,7 +1843,10 @@
           <a:p>
             <a:r>
               <a:rPr lang="en-US" dirty="0"/>
-              <a:t>Notas: Este é o conceito mais estranho para quem vem do Krita/Photoshop puro. O artista escolhe qual canal está ativo no momento de pintar, mas a pilha de camadas (ordem, blend mode, opacidade) é a mesma para todos os canais. Essa distinção evita o erro mais comum da aula: pintar no canal errado. SSS não foi abordado na Semana 7 (ficou reservado para hoje, de propósito, para não sobrecarregar a mini-aula de Normal Map/procedural) — aqui entra apenas de forma breve e conceitual, sem cobrança prática: localizar o canal na interface é suficiente para quem tiver um elemento orgânico no kit (flor, folha, tecido, vela, cristal).</a:t>
+              <a:t>Notas: Fecha a mini-aula antes da demonstração. Este pacote de três passos é o roteiro exato que será repetido na demonstração e nos dois estúdios do dia.
+[!FIGURA]
+Objetivo didático: um diagrama visual (substituindo o antigo fluxo de três canais da Semana 7) mostrando os três passos — Refinar → Exportar quatro mapas → Conectar — com destaque para o Normal como novidade da semana.
+Como produzir: regenerar o mermaid do pipeline da aula com os quatro mapas explícitos (Albedo, Roughness, Metallic, Normal) e publicar como assets/mermaid-3.png; até lá, apresentar esta etapa apenas com a lista acima.</a:t>
             </a:r>
             <a:endParaRPr lang="en-US" dirty="0"/>
           </a:p>
@@ -1867,7 +1869,7 @@
           <a:p>
             <a:fld id="{F7021451-1387-4CA6-816F-3879F97B5CBC}" type="slidenum">
               <a:rPr lang="en-US"/>
-              <a:t>7</a:t>
+              <a:t>8</a:t>
             </a:fld>
             <a:endParaRPr lang="en-US"/>
           </a:p>
@@ -1886,94 +1888,6 @@
 </p:notes>
 </file>
 
-<file path=ppt/notesSlides/notesSlide8.xml><?xml version="1.0" encoding="utf-8"?>
-<p:notes xmlns:a="http://schemas.openxmlformats.org/drawingml/2006/main" xmlns:r="http://schemas.openxmlformats.org/officeDocument/2006/relationships" xmlns:p="http://schemas.openxmlformats.org/presentationml/2006/main">
-  <p:cSld>
-    <p:spTree>
-      <p:nvGrpSpPr>
-        <p:cNvPr id="1" name=""/>
-        <p:cNvGrpSpPr/>
-        <p:nvPr/>
-      </p:nvGrpSpPr>
-      <p:grpSpPr>
-        <a:xfrm>
-          <a:off x="0" y="0"/>
-          <a:ext cx="0" cy="0"/>
-          <a:chOff x="0" y="0"/>
-          <a:chExt cx="0" cy="0"/>
-        </a:xfrm>
-      </p:grpSpPr>
-      <p:sp>
-        <p:nvSpPr>
-          <p:cNvPr id="2" name="Slide Image Placeholder 1"/>
-          <p:cNvSpPr>
-            <a:spLocks noGrp="1" noRot="1" noChangeAspect="1"/>
-          </p:cNvSpPr>
-          <p:nvPr>
-            <p:ph type="sldImg"/>
-          </p:nvPr>
-        </p:nvSpPr>
-        <p:spPr/>
-      </p:sp>
-      <p:sp>
-        <p:nvSpPr>
-          <p:cNvPr id="3" name="Notes Placeholder 2"/>
-          <p:cNvSpPr>
-            <a:spLocks noGrp="1"/>
-          </p:cNvSpPr>
-          <p:nvPr>
-            <p:ph type="body" idx="1"/>
-          </p:nvPr>
-        </p:nvSpPr>
-        <p:spPr/>
-        <p:txBody>
-          <a:bodyPr/>
-          <a:lstStyle/>
-          <a:p>
-            <a:r>
-              <a:rPr lang="en-US" dirty="0"/>
-              <a:t>Notas: Núcleo procedimental da semana. Exportar como .obj (com UV Coords marcado) ou .fbx. Importar em Per Pixel Painting. Pintar Color, depois Roughness, depois Metallic — nessa ordem. Exportar como PNG e reconectar no Principled BSDF, lembrando do Color Space Non-Color para os mapas de dado. O GitHub Action converte o mermaid em imagem.</a:t>
-            </a:r>
-            <a:endParaRPr lang="en-US" dirty="0"/>
-          </a:p>
-        </p:txBody>
-      </p:sp>
-      <p:sp>
-        <p:nvSpPr>
-          <p:cNvPr id="4" name="Slide Number Placeholder 3"/>
-          <p:cNvSpPr>
-            <a:spLocks noGrp="1"/>
-          </p:cNvSpPr>
-          <p:nvPr>
-            <p:ph type="sldNum" sz="quarter" idx="10"/>
-          </p:nvPr>
-        </p:nvSpPr>
-        <p:spPr/>
-        <p:txBody>
-          <a:bodyPr/>
-          <a:lstStyle/>
-          <a:p>
-            <a:fld id="{F7021451-1387-4CA6-816F-3879F97B5CBC}" type="slidenum">
-              <a:rPr lang="en-US"/>
-              <a:t>8</a:t>
-            </a:fld>
-            <a:endParaRPr lang="en-US"/>
-          </a:p>
-        </p:txBody>
-      </p:sp>
-    </p:spTree>
-    <p:extLst>
-      <p:ext uri="{BB962C8B-B14F-4D97-AF65-F5344CB8AC3E}">
-        <p14:creationId xmlns:p14="http://schemas.microsoft.com/office/powerpoint/2010/main" val="1024086991"/>
-      </p:ext>
-    </p:extLst>
-  </p:cSld>
-  <p:clrMapOvr>
-    <a:masterClrMapping/>
-  </p:clrMapOvr>
-</p:notes>
-</file>
-
 <file path=ppt/notesSlides/notesSlide9.xml><?xml version="1.0" encoding="utf-8"?>
 <p:notes xmlns:a="http://schemas.openxmlformats.org/drawingml/2006/main" xmlns:r="http://schemas.openxmlformats.org/officeDocument/2006/relationships" xmlns:p="http://schemas.openxmlformats.org/presentationml/2006/main">
   <p:cSld>
@@ -2020,12 +1934,7 @@
           <a:p>
             <a:r>
               <a:rPr lang="en-US" dirty="0"/>
-              <a:t>Notas: Passo 1 da demonstração. Reforçar que o 3D Coat detecta o UV automaticamente se o export estiver correto. Workflow errado (Specular/Glossiness) muda a lógica dos canais pintados mais adiante — confirmar sempre Metalness PBR neste pipeline.
-[!FIGURA]
-Objetivo didático: mostrar a janela de importação do 3D Coat para que os estudantes reconheçam as opções antes de tentar sozinhos no estúdio.
-Arquivo sugerido: assets/importacao_per_pixel.webp
-Descrição: captura de tela da janela "Import for Per-Pixel Painting" do 3D Coat, com o campo de resolução marcado em 1024x1024 e o seletor de workflow em "Metalness PBR" destacado.
-Como produzir: no 3D Coat, abrir File → Import for Per-Pixel Painting com um asset de demonstração, capturar a janela de importação antes de confirmar, destacar os dois campos citados com uma seta ou contorno no Krita.</a:t>
+              <a:t>Notas: Passo 1 da demonstração / Etapa 1 do Estúdio 1. A camada de detalhe precisa concordar com a máscara de baixo, não competir com ela — se as duas contarem histórias diferentes de desgaste, o material perde coerência.</a:t>
             </a:r>
             <a:endParaRPr lang="en-US" dirty="0"/>
           </a:p>
@@ -2689,45 +2598,6 @@
 <file path=ppt/slides/slide17.xml><?xml version="1.0" encoding="utf-8"?>
 <p:sld xmlns:a="http://schemas.openxmlformats.org/drawingml/2006/main" xmlns:r="http://schemas.openxmlformats.org/officeDocument/2006/relationships" xmlns:p="http://schemas.openxmlformats.org/presentationml/2006/main">
   <p:cSld name="Slide 17">
-    <p:bg>
-      <p:bgPr>
-        <a:blipFill dpi="0" rotWithShape="1">
-          <a:blip r:embed="rId1">
-            <a:lum/>
-          </a:blip>
-          <a:srcRect/>
-          <a:stretch>
-            <a:fillRect/>
-          </a:stretch>
-        </a:blipFill>
-        <a:effectLst/>
-      </p:bgPr>
-    </p:bg>
-    <p:spTree>
-      <p:nvGrpSpPr>
-        <p:cNvPr id="1" name=""/>
-        <p:cNvGrpSpPr/>
-        <p:nvPr/>
-      </p:nvGrpSpPr>
-      <p:grpSpPr>
-        <a:xfrm>
-          <a:off x="0" y="0"/>
-          <a:ext cx="0" cy="0"/>
-          <a:chOff x="0" y="0"/>
-          <a:chExt cx="0" cy="0"/>
-        </a:xfrm>
-      </p:grpSpPr>
-    </p:spTree>
-  </p:cSld>
-  <p:clrMapOvr>
-    <a:masterClrMapping/>
-  </p:clrMapOvr>
-</p:sld>
-</file>
-
-<file path=ppt/slides/slide18.xml><?xml version="1.0" encoding="utf-8"?>
-<p:sld xmlns:a="http://schemas.openxmlformats.org/drawingml/2006/main" xmlns:r="http://schemas.openxmlformats.org/officeDocument/2006/relationships" xmlns:p="http://schemas.openxmlformats.org/presentationml/2006/main">
-  <p:cSld name="Slide 18">
     <p:bg>
       <p:bgPr>
         <a:blipFill dpi="0" rotWithShape="1">

--- a/Slides/Semana 8/semana_8_slides.pptx
+++ b/Slides/Semana 8/semana_8_slides.pptx
@@ -22,9 +22,13 @@
     <p:sldId id="270" r:id="rId16"/>
     <p:sldId id="271" r:id="rId17"/>
     <p:sldId id="272" r:id="rId18"/>
+    <p:sldId id="273" r:id="rId19"/>
+    <p:sldId id="274" r:id="rId20"/>
+    <p:sldId id="275" r:id="rId21"/>
+    <p:sldId id="276" r:id="rId22"/>
   </p:sldIdLst>
   <p:notesMasterIdLst>
-    <p:notesMasterId r:id="rId19"/>
+    <p:notesMasterId r:id="rId23"/>
   </p:notesMasterIdLst>
   <p:sldSz cx="12192000" cy="6858000"/>
   <p:notesSz cx="6858000" cy="12192000"/>
@@ -518,7 +522,7 @@
           <a:p>
             <a:r>
               <a:rPr lang="en-US" dirty="0"/>
-              <a:t>Notas: Abertura da mini aula (20 min). Esta é a segunda Crítica Formal do semestre (CF2) — após a Semana 4 — e encerra a Unidade II. Mensagem central: a Semana 7 já fez a migração completa para o 3D Coat e já deu ao Asset 01 profundidade real via bake de AO/Curvature e Normal pintado no canal Depth. Hoje não se reintroduz a ferramenta — aprofunda-se o que já está em andamento: mais controle de camada, o canal Metallic, e o fechamento com a exportação dos quatro mapas PBR (Albedo, Metallic, Roughness e Normal, todos vindos do 3D Coat), reconectados no Blender sem nenhum nó procedural remanescente.</a:t>
+              <a:t>Notas: Marcar que hoje é a segunda Crítica Formal do semestre (CF2), fechando a Unidade II. É a mesma peça em jogo desde a Semana 3 — hoje o material fica tecnicamente completo e pronto para a Unity.</a:t>
             </a:r>
             <a:endParaRPr lang="en-US" dirty="0"/>
           </a:p>
@@ -606,7 +610,7 @@
           <a:p>
             <a:r>
               <a:rPr lang="en-US" dirty="0"/>
-              <a:t>Notas: Passo 2 da demonstração / Etapa 2 do Estúdio 1. Para a maioria dos kits (Medieval, Fantasia, pós-apocalíptico), pedra, madeira e concreto ficam em Metallic 0 sem exceção. Reservar o Metallic 1 apenas para metal exposto, com preto pintado nas áreas de ferrugem ou tinta usando a máscara de Curvature como guia.</a:t>
+              <a:t>Notas: Fechar a mini aula amarrando os conceitos antes da demonstração.</a:t>
             </a:r>
             <a:endParaRPr lang="en-US" dirty="0"/>
           </a:p>
@@ -694,7 +698,12 @@
           <a:p>
             <a:r>
               <a:rPr lang="en-US" dirty="0"/>
-              <a:t>Notas: Passo 3 da demonstração / Etapa 3 do Estúdio 1. No Encontro 2, esta revisão pode ganhar uma camada adicional `Roughness_Sujeira` (Multiply, 40–50%, pintada em áreas côncavas com valor mais alto) para incorporar o feedback da crítica formal.</a:t>
+              <a:t>Notas: Transição para os 20 min de demonstração. Passo a passo: (1) camada de detalhe focal no Color, (2) Metallic Fill preto/branco conforme material — transição nítida, não gradiente, (3) revisão do Roughness ligando/desligando camadas, (4) exportação: File → Export Textures, PNG 1024×1024, os 4 mapas, (5) Blender: 4 nós Image Texture, Albedo em sRGB, os demais em Non-Color, nó Normal Map obrigatório entre o Image Texture do Normal e o Principled BSDF.
+[!FIGURA]
+Objetivo didático — Mostrar o resultado final: quatro mapas PNG exportados lado a lado e o node tree do Blender com a conexão correta, incluindo o nó Normal Map.
+Arquivo sugerido — assets/demo_exportacao_4_mapas.webp
+Descrição — Captura de tela combinando (1) os quatro arquivos PNG exportados (Albedo, Roughness, Metallic, Normal) visíveis no explorador de arquivos, e (2) o Shader Editor do Blender com os quatro nós Image Texture conectados ao Principled BSDF, incluindo o nó Normal Map intermediário.
+Como produzir — Capturar no explorador de arquivos após a exportação de demonstração e no Blender após a reconexão do material.</a:t>
             </a:r>
             <a:endParaRPr lang="en-US" dirty="0"/>
           </a:p>
@@ -782,7 +791,7 @@
           <a:p>
             <a:r>
               <a:rPr lang="en-US" dirty="0"/>
-              <a:t>Notas: Passo 4 e 5 da demonstração. Regra fixa a repetir sempre: só o Albedo fica em sRGB; todo mapa de DADO (Roughness, Metallic, Normal) vai em Non-Color. O nó Normal Map é obrigatório entre o Image Texture do Normal e o Principled BSDF — é um erro silencioso, o material roda sem erro mas com aparência errada.</a:t>
+              <a:t>Notas: Divisória entre a mini aula e o estúdio. Os slides a seguir ficam projetados durante a produção — servem de consigna e timebox visíveis, apresentados um a um conforme a etapa correspondente começa.</a:t>
             </a:r>
             <a:endParaRPr lang="en-US" dirty="0"/>
           </a:p>
@@ -870,7 +879,7 @@
           <a:p>
             <a:r>
               <a:rPr lang="en-US" dirty="0"/>
-              <a:t>Notas: Alinhado às Possíveis Dificuldades do plano de aula. Circular no estúdio caçando exatamente estes três padrões, e um quarto ponto de checagem: os quatro mapas foram de fato exportados, conferindo no explorador de arquivos — não só na confirmação do 3D Coat.</a:t>
+              <a:t>Notas: Encontro 1. Se houver tempo: testar uma segunda camada de detalhe em outra área, comparando o peso relativo das duas.</a:t>
             </a:r>
             <a:endParaRPr lang="en-US" dirty="0"/>
           </a:p>
@@ -958,7 +967,7 @@
           <a:p>
             <a:r>
               <a:rPr lang="en-US" dirty="0"/>
-              <a:t>Notas: Contextualizar o valor profissional. Amarra à Semana 16, onde o mesmo tipo de inversão de canal (Roughness vs. Smoothness) reaparece na Unity.</a:t>
+              <a:t>Notas: Para quem tiver elemento orgânico/translúcido: localizar o canal Subsurface e testar 0.05–0.15, avaliando no Render Room antes de decidir se mantém.</a:t>
             </a:r>
             <a:endParaRPr lang="en-US" dirty="0"/>
           </a:p>
@@ -1046,7 +1055,7 @@
           <a:p>
             <a:r>
               <a:rPr lang="en-US" dirty="0"/>
-              <a:t>Notas: Amarrar a mini aula antes da demonstração. Hoje é a segunda Crítica Formal do semestre (CF2) — após a Semana 4 — e encerra a Unidade II. O objeto da crítica é o trabalho das Semanas 6–7 consolidado; o refinamento feito no Estúdio 1 pode entrar como contexto, mas o foco avaliativo é o estado consolidado do material nas duas trilhas visuais (fotorrealista e estilizada).</a:t>
+              <a:t>Notas: Verificar no Render Room ligando/desligando cada camada — a contribuição de cada uma deve ser visível.</a:t>
             </a:r>
             <a:endParaRPr lang="en-US" dirty="0"/>
           </a:p>
@@ -1134,7 +1143,7 @@
           <a:p>
             <a:r>
               <a:rPr lang="en-US" dirty="0"/>
-              <a:t>Notas: Consigna do estúdio de 50 minutos. Não precisa ser a versão final — o Encontro 2 tem mais 60 minutos de estúdio, incluindo a reconexão completa no Blender. Nomenclatura esperada: [Nome]_Asset01_S08.3b e pasta [Nome]_Asset01_Mapas_S08/. Lembrar de distribuir a autoavaliação ao final deste encontro — é pré-requisito da crítica formal (CF2) do Encontro 2.</a:t>
+              <a:t>Notas: Encerramento do Encontro 1. Distribuir a Autoavaliação agora, se ainda não foi distribuída — é pré-requisito para a Crítica Formal do Encontro 2.</a:t>
             </a:r>
             <a:endParaRPr lang="en-US" dirty="0"/>
           </a:p>
@@ -1222,12 +1231,7 @@
           <a:p>
             <a:r>
               <a:rPr lang="en-US" dirty="0"/>
-              <a:t>Notas: Transição para a demonstração de 20 min. Sequência: abrir o arquivo de demonstração da Semana 7 → refinar Color com camada de detalhe → preencher Metallic (pedra = preto, metal = branco com ferrugem) → revisar Roughness combinado → exportar os quatro mapas → conectar no Blender (quatro Image Texture + nó Normal Map) e comparar com o estado anterior.
-[!FIGURA]
-Objetivo didático: antecipar o layout de tela da demonstração para que a turma acompanhe a comparação entre refinamento no 3D Coat e reconexão no Blender.
-Arquivo sugerido: assets/demo_3dcoat_pipeline.webp
-Descrição: tela dividida. À esquerda, o Paint Room do 3D Coat com o painel de Layers visível (camadas Base_Color, Detalhe_Cor, Metallic, Roughness base/desgaste/sujeira) sobre um asset de parede de pedra. À direita, o Shader Editor do Blender com quatro nós Image Texture (Albedo, Roughness, Metallic, Normal), o nó Normal Map, e o Viewport Rendered mostrando o resultado final.
-Como produzir: no 3D Coat, montar as camadas citadas em um asset de demonstração e capturar o Paint Room com o painel de Layers aberto; no Blender, montar o node tree com os quatro Image Texture + Normal Map + Principled BSDF. Compor as duas capturas no Krita.</a:t>
+              <a:t>Notas: Abertura do Encontro 2. Quem não tiver autoavaliação preenchida: 5 min emergenciais antes de começar. Turmas grandes: sortear 3-4 para apresentar formalmente, avaliar os demais pela Ficha de Crítica.</a:t>
             </a:r>
             <a:endParaRPr lang="en-US" dirty="0"/>
           </a:p>
@@ -1269,6 +1273,182 @@
 </p:notes>
 </file>
 
+<file path=ppt/notesSlides/notesSlide18.xml><?xml version="1.0" encoding="utf-8"?>
+<p:notes xmlns:a="http://schemas.openxmlformats.org/drawingml/2006/main" xmlns:r="http://schemas.openxmlformats.org/officeDocument/2006/relationships" xmlns:p="http://schemas.openxmlformats.org/presentationml/2006/main">
+  <p:cSld>
+    <p:spTree>
+      <p:nvGrpSpPr>
+        <p:cNvPr id="1" name=""/>
+        <p:cNvGrpSpPr/>
+        <p:nvPr/>
+      </p:nvGrpSpPr>
+      <p:grpSpPr>
+        <a:xfrm>
+          <a:off x="0" y="0"/>
+          <a:ext cx="0" cy="0"/>
+          <a:chOff x="0" y="0"/>
+          <a:chExt cx="0" cy="0"/>
+        </a:xfrm>
+      </p:grpSpPr>
+      <p:sp>
+        <p:nvSpPr>
+          <p:cNvPr id="2" name="Slide Image Placeholder 1"/>
+          <p:cNvSpPr>
+            <a:spLocks noGrp="1" noRot="1" noChangeAspect="1"/>
+          </p:cNvSpPr>
+          <p:nvPr>
+            <p:ph type="sldImg"/>
+          </p:nvPr>
+        </p:nvSpPr>
+        <p:spPr/>
+      </p:sp>
+      <p:sp>
+        <p:nvSpPr>
+          <p:cNvPr id="3" name="Notes Placeholder 2"/>
+          <p:cNvSpPr>
+            <a:spLocks noGrp="1"/>
+          </p:cNvSpPr>
+          <p:nvPr>
+            <p:ph type="body" idx="1"/>
+          </p:nvPr>
+        </p:nvSpPr>
+        <p:spPr/>
+        <p:txBody>
+          <a:bodyPr/>
+          <a:lstStyle/>
+          <a:p>
+            <a:r>
+              <a:rPr lang="en-US" dirty="0"/>
+              <a:t>Notas: Se sobrar tempo: revisar o canal Subsurface (quando aplicável) e comparar com o moodboard uma última vez.</a:t>
+            </a:r>
+            <a:endParaRPr lang="en-US" dirty="0"/>
+          </a:p>
+        </p:txBody>
+      </p:sp>
+      <p:sp>
+        <p:nvSpPr>
+          <p:cNvPr id="4" name="Slide Number Placeholder 3"/>
+          <p:cNvSpPr>
+            <a:spLocks noGrp="1"/>
+          </p:cNvSpPr>
+          <p:nvPr>
+            <p:ph type="sldNum" sz="quarter" idx="10"/>
+          </p:nvPr>
+        </p:nvSpPr>
+        <p:spPr/>
+        <p:txBody>
+          <a:bodyPr/>
+          <a:lstStyle/>
+          <a:p>
+            <a:fld id="{F7021451-1387-4CA6-816F-3879F97B5CBC}" type="slidenum">
+              <a:rPr lang="en-US"/>
+              <a:t>18</a:t>
+            </a:fld>
+            <a:endParaRPr lang="en-US"/>
+          </a:p>
+        </p:txBody>
+      </p:sp>
+    </p:spTree>
+    <p:extLst>
+      <p:ext uri="{BB962C8B-B14F-4D97-AF65-F5344CB8AC3E}">
+        <p14:creationId xmlns:p14="http://schemas.microsoft.com/office/powerpoint/2010/main" val="1024086991"/>
+      </p:ext>
+    </p:extLst>
+  </p:cSld>
+  <p:clrMapOvr>
+    <a:masterClrMapping/>
+  </p:clrMapOvr>
+</p:notes>
+</file>
+
+<file path=ppt/notesSlides/notesSlide19.xml><?xml version="1.0" encoding="utf-8"?>
+<p:notes xmlns:a="http://schemas.openxmlformats.org/drawingml/2006/main" xmlns:r="http://schemas.openxmlformats.org/officeDocument/2006/relationships" xmlns:p="http://schemas.openxmlformats.org/presentationml/2006/main">
+  <p:cSld>
+    <p:spTree>
+      <p:nvGrpSpPr>
+        <p:cNvPr id="1" name=""/>
+        <p:cNvGrpSpPr/>
+        <p:nvPr/>
+      </p:nvGrpSpPr>
+      <p:grpSpPr>
+        <a:xfrm>
+          <a:off x="0" y="0"/>
+          <a:ext cx="0" cy="0"/>
+          <a:chOff x="0" y="0"/>
+          <a:chExt cx="0" cy="0"/>
+        </a:xfrm>
+      </p:grpSpPr>
+      <p:sp>
+        <p:nvSpPr>
+          <p:cNvPr id="2" name="Slide Image Placeholder 1"/>
+          <p:cNvSpPr>
+            <a:spLocks noGrp="1" noRot="1" noChangeAspect="1"/>
+          </p:cNvSpPr>
+          <p:nvPr>
+            <p:ph type="sldImg"/>
+          </p:nvPr>
+        </p:nvSpPr>
+        <p:spPr/>
+      </p:sp>
+      <p:sp>
+        <p:nvSpPr>
+          <p:cNvPr id="3" name="Notes Placeholder 2"/>
+          <p:cNvSpPr>
+            <a:spLocks noGrp="1"/>
+          </p:cNvSpPr>
+          <p:nvPr>
+            <p:ph type="body" idx="1"/>
+          </p:nvPr>
+        </p:nvSpPr>
+        <p:spPr/>
+        <p:txBody>
+          <a:bodyPr/>
+          <a:lstStyle/>
+          <a:p>
+            <a:r>
+              <a:rPr lang="en-US" dirty="0"/>
+              <a:t>Notas: Confirmar no explorador de arquivos que os quatro PNGs foram gerados com tamanho esperado.</a:t>
+            </a:r>
+            <a:endParaRPr lang="en-US" dirty="0"/>
+          </a:p>
+        </p:txBody>
+      </p:sp>
+      <p:sp>
+        <p:nvSpPr>
+          <p:cNvPr id="4" name="Slide Number Placeholder 3"/>
+          <p:cNvSpPr>
+            <a:spLocks noGrp="1"/>
+          </p:cNvSpPr>
+          <p:nvPr>
+            <p:ph type="sldNum" sz="quarter" idx="10"/>
+          </p:nvPr>
+        </p:nvSpPr>
+        <p:spPr/>
+        <p:txBody>
+          <a:bodyPr/>
+          <a:lstStyle/>
+          <a:p>
+            <a:fld id="{F7021451-1387-4CA6-816F-3879F97B5CBC}" type="slidenum">
+              <a:rPr lang="en-US"/>
+              <a:t>19</a:t>
+            </a:fld>
+            <a:endParaRPr lang="en-US"/>
+          </a:p>
+        </p:txBody>
+      </p:sp>
+    </p:spTree>
+    <p:extLst>
+      <p:ext uri="{BB962C8B-B14F-4D97-AF65-F5344CB8AC3E}">
+        <p14:creationId xmlns:p14="http://schemas.microsoft.com/office/powerpoint/2010/main" val="1024086991"/>
+      </p:ext>
+    </p:extLst>
+  </p:cSld>
+  <p:clrMapOvr>
+    <a:masterClrMapping/>
+  </p:clrMapOvr>
+</p:notes>
+</file>
+
 <file path=ppt/notesSlides/notesSlide2.xml><?xml version="1.0" encoding="utf-8"?>
 <p:notes xmlns:a="http://schemas.openxmlformats.org/drawingml/2006/main" xmlns:r="http://schemas.openxmlformats.org/officeDocument/2006/relationships" xmlns:p="http://schemas.openxmlformats.org/presentationml/2006/main">
   <p:cSld>
@@ -1315,7 +1495,7 @@
           <a:p>
             <a:r>
               <a:rPr lang="en-US" dirty="0"/>
-              <a:t>Notas: Ler rápido. A turma já domina a mecânica básica do 3D Coat desde a Semana 7 — esta mini-aula não reapresenta a ferramenta. O Normal Map já foi bakeado a partir do Depth pintado na Semana 7; hoje ele é exportado junto com os demais mapas pela primeira vez. O objetivo 6 (apresentação na crítica formal) fica para o Encontro 2.</a:t>
+              <a:t>Notas: Recapitular em uma frase. Não reabrir o conteúdo técnico do bake da Semana 7 — isso já foi ensinado. Só situar o que falta.</a:t>
             </a:r>
             <a:endParaRPr lang="en-US" dirty="0"/>
           </a:p>
@@ -1357,6 +1537,182 @@
 </p:notes>
 </file>
 
+<file path=ppt/notesSlides/notesSlide20.xml><?xml version="1.0" encoding="utf-8"?>
+<p:notes xmlns:a="http://schemas.openxmlformats.org/drawingml/2006/main" xmlns:r="http://schemas.openxmlformats.org/officeDocument/2006/relationships" xmlns:p="http://schemas.openxmlformats.org/presentationml/2006/main">
+  <p:cSld>
+    <p:spTree>
+      <p:nvGrpSpPr>
+        <p:cNvPr id="1" name=""/>
+        <p:cNvGrpSpPr/>
+        <p:nvPr/>
+      </p:nvGrpSpPr>
+      <p:grpSpPr>
+        <a:xfrm>
+          <a:off x="0" y="0"/>
+          <a:ext cx="0" cy="0"/>
+          <a:chOff x="0" y="0"/>
+          <a:chExt cx="0" cy="0"/>
+        </a:xfrm>
+      </p:grpSpPr>
+      <p:sp>
+        <p:nvSpPr>
+          <p:cNvPr id="2" name="Slide Image Placeholder 1"/>
+          <p:cNvSpPr>
+            <a:spLocks noGrp="1" noRot="1" noChangeAspect="1"/>
+          </p:cNvSpPr>
+          <p:nvPr>
+            <p:ph type="sldImg"/>
+          </p:nvPr>
+        </p:nvSpPr>
+        <p:spPr/>
+      </p:sp>
+      <p:sp>
+        <p:nvSpPr>
+          <p:cNvPr id="3" name="Notes Placeholder 2"/>
+          <p:cNvSpPr>
+            <a:spLocks noGrp="1"/>
+          </p:cNvSpPr>
+          <p:nvPr>
+            <p:ph type="body" idx="1"/>
+          </p:nvPr>
+        </p:nvSpPr>
+        <p:spPr/>
+        <p:txBody>
+          <a:bodyPr/>
+          <a:lstStyle/>
+          <a:p>
+            <a:r>
+              <a:rPr lang="en-US" dirty="0"/>
+              <a:t>Notas: Verificar Color Space de cada nó — só o Albedo em sRGB, todos os outros em Non-Color. Erro silencioso: material roda sem erro, mas com aparência errada.</a:t>
+            </a:r>
+            <a:endParaRPr lang="en-US" dirty="0"/>
+          </a:p>
+        </p:txBody>
+      </p:sp>
+      <p:sp>
+        <p:nvSpPr>
+          <p:cNvPr id="4" name="Slide Number Placeholder 3"/>
+          <p:cNvSpPr>
+            <a:spLocks noGrp="1"/>
+          </p:cNvSpPr>
+          <p:nvPr>
+            <p:ph type="sldNum" sz="quarter" idx="10"/>
+          </p:nvPr>
+        </p:nvSpPr>
+        <p:spPr/>
+        <p:txBody>
+          <a:bodyPr/>
+          <a:lstStyle/>
+          <a:p>
+            <a:fld id="{F7021451-1387-4CA6-816F-3879F97B5CBC}" type="slidenum">
+              <a:rPr lang="en-US"/>
+              <a:t>20</a:t>
+            </a:fld>
+            <a:endParaRPr lang="en-US"/>
+          </a:p>
+        </p:txBody>
+      </p:sp>
+    </p:spTree>
+    <p:extLst>
+      <p:ext uri="{BB962C8B-B14F-4D97-AF65-F5344CB8AC3E}">
+        <p14:creationId xmlns:p14="http://schemas.microsoft.com/office/powerpoint/2010/main" val="1024086991"/>
+      </p:ext>
+    </p:extLst>
+  </p:cSld>
+  <p:clrMapOvr>
+    <a:masterClrMapping/>
+  </p:clrMapOvr>
+</p:notes>
+</file>
+
+<file path=ppt/notesSlides/notesSlide21.xml><?xml version="1.0" encoding="utf-8"?>
+<p:notes xmlns:a="http://schemas.openxmlformats.org/drawingml/2006/main" xmlns:r="http://schemas.openxmlformats.org/officeDocument/2006/relationships" xmlns:p="http://schemas.openxmlformats.org/presentationml/2006/main">
+  <p:cSld>
+    <p:spTree>
+      <p:nvGrpSpPr>
+        <p:cNvPr id="1" name=""/>
+        <p:cNvGrpSpPr/>
+        <p:nvPr/>
+      </p:nvGrpSpPr>
+      <p:grpSpPr>
+        <a:xfrm>
+          <a:off x="0" y="0"/>
+          <a:ext cx="0" cy="0"/>
+          <a:chOff x="0" y="0"/>
+          <a:chExt cx="0" cy="0"/>
+        </a:xfrm>
+      </p:grpSpPr>
+      <p:sp>
+        <p:nvSpPr>
+          <p:cNvPr id="2" name="Slide Image Placeholder 1"/>
+          <p:cNvSpPr>
+            <a:spLocks noGrp="1" noRot="1" noChangeAspect="1"/>
+          </p:cNvSpPr>
+          <p:nvPr>
+            <p:ph type="sldImg"/>
+          </p:nvPr>
+        </p:nvSpPr>
+        <p:spPr/>
+      </p:sp>
+      <p:sp>
+        <p:nvSpPr>
+          <p:cNvPr id="3" name="Notes Placeholder 2"/>
+          <p:cNvSpPr>
+            <a:spLocks noGrp="1"/>
+          </p:cNvSpPr>
+          <p:nvPr>
+            <p:ph type="body" idx="1"/>
+          </p:nvPr>
+        </p:nvSpPr>
+        <p:spPr/>
+        <p:txBody>
+          <a:bodyPr/>
+          <a:lstStyle/>
+          <a:p>
+            <a:r>
+              <a:rPr lang="en-US" dirty="0"/>
+              <a:t>Notas: Fechamento (10 min): "Hoje vocês fecharam a Unidade II: um material PBR completo, funcionando igualmente bem nas duas trilhas." Ponte: na Semana 9, texturização artística — edge wear, dirt e leitura de silhueta, sobre o mesmo Hero Asset Referência.</a:t>
+            </a:r>
+            <a:endParaRPr lang="en-US" dirty="0"/>
+          </a:p>
+        </p:txBody>
+      </p:sp>
+      <p:sp>
+        <p:nvSpPr>
+          <p:cNvPr id="4" name="Slide Number Placeholder 3"/>
+          <p:cNvSpPr>
+            <a:spLocks noGrp="1"/>
+          </p:cNvSpPr>
+          <p:nvPr>
+            <p:ph type="sldNum" sz="quarter" idx="10"/>
+          </p:nvPr>
+        </p:nvSpPr>
+        <p:spPr/>
+        <p:txBody>
+          <a:bodyPr/>
+          <a:lstStyle/>
+          <a:p>
+            <a:fld id="{F7021451-1387-4CA6-816F-3879F97B5CBC}" type="slidenum">
+              <a:rPr lang="en-US"/>
+              <a:t>21</a:t>
+            </a:fld>
+            <a:endParaRPr lang="en-US"/>
+          </a:p>
+        </p:txBody>
+      </p:sp>
+    </p:spTree>
+    <p:extLst>
+      <p:ext uri="{BB962C8B-B14F-4D97-AF65-F5344CB8AC3E}">
+        <p14:creationId xmlns:p14="http://schemas.microsoft.com/office/powerpoint/2010/main" val="1024086991"/>
+      </p:ext>
+    </p:extLst>
+  </p:cSld>
+  <p:clrMapOvr>
+    <a:masterClrMapping/>
+  </p:clrMapOvr>
+</p:notes>
+</file>
+
 <file path=ppt/notesSlides/notesSlide3.xml><?xml version="1.0" encoding="utf-8"?>
 <p:notes xmlns:a="http://schemas.openxmlformats.org/drawingml/2006/main" xmlns:r="http://schemas.openxmlformats.org/officeDocument/2006/relationships" xmlns:p="http://schemas.openxmlformats.org/presentationml/2006/main">
   <p:cSld>
@@ -1403,7 +1759,7 @@
           <a:p>
             <a:r>
               <a:rPr lang="en-US" dirty="0"/>
-              <a:t>Notas: Pergunta de abertura da mini aula. Conduzir a turma a perceber que falta: (1) o Metallic, ainda não trabalhado a fundo; (2) mais uma camada de detalhe intencional sobre o que já existe; (3) a exportação de tudo isso como imagem real, incluindo o Normal pela primeira vez.</a:t>
+              <a:t>Notas: Os cinco primeiros objetivos são o trabalho técnico da semana; o sexto é a própria CF2.</a:t>
             </a:r>
             <a:endParaRPr lang="en-US" dirty="0"/>
           </a:p>
@@ -1491,7 +1847,7 @@
           <a:p>
             <a:r>
               <a:rPr lang="en-US" dirty="0"/>
-              <a:t>Notas: Recapitulação rápida (1 min) — conceito já visto na Semana 7, não precisa de tempo de demonstração aqui. Serve só para reancorar por que a exportação de hoje fecha o pipeline.</a:t>
+              <a:t>Notas: Vocês já têm Color, Roughness e Normal ativos desde a semana passada. Conduzir a turma a perceber que falta: (1) o Metallic, ainda não trabalhado a fundo; (2) mais uma camada de detalhe intencional; (3) a exportação de tudo como imagem real.</a:t>
             </a:r>
             <a:endParaRPr lang="en-US" dirty="0"/>
           </a:p>
@@ -1579,7 +1935,7 @@
           <a:p>
             <a:r>
               <a:rPr lang="en-US" dirty="0"/>
-              <a:t>Notas: Recapitulação visual. O 3D Coat recebe a malha com UV do Blender e devolve mapas de imagem que representam cada canal PBR — hoje, os quatro. Esses mapas voltam ao Blender (para conferência) ou vão direto para a Unity.</a:t>
+              <a:t>Notas: Recapitulação rápida de 1 min antes do conteúdo novo (SSS e combinação de camadas).</a:t>
             </a:r>
             <a:endParaRPr lang="en-US" dirty="0"/>
           </a:p>
@@ -1667,7 +2023,7 @@
           <a:p>
             <a:r>
               <a:rPr lang="en-US" dirty="0"/>
-              <a:t>Notas: A estrutura de camadas (uma camada, vários canais) já é conhecida desde a Semana 7 — hoje entra especificamente o canal Subsurface, que ainda não tinha sido ativado. Não há cobrança prática de pintura no SSS para quem não tem elemento orgânico no kit — localizar o canal na interface já é suficiente.</a:t>
+              <a:t>Notas: Para a maioria dos Hero Assets do kit (pedra, metal, madeira, concreto) o SSS não se aplica — e não pintar nada nesse canal é a decisão fisicamente correta, não uma omissão.</a:t>
             </a:r>
             <a:endParaRPr lang="en-US" dirty="0"/>
           </a:p>
@@ -1755,7 +2111,7 @@
           <a:p>
             <a:r>
               <a:rPr lang="en-US" dirty="0"/>
-              <a:t>Notas: O refinamento desta semana consiste em ajustar o peso relativo dessas três camadas — nenhuma delas sozinha deveria contar toda a história do material. Esta é a lógica central da mini-aula, junto com o SSS.</a:t>
+              <a:t>Notas: Se ao desligar a máscara o material sumir ou virar outra coisa, ela está fazendo trabalho demais sozinha. Como é uma única peça este semestre, vale ir além do mínimo: segunda camada de detalhe focal, revisar intensidade isoladamente no Render Room.</a:t>
             </a:r>
             <a:endParaRPr lang="en-US" dirty="0"/>
           </a:p>
@@ -1843,10 +2199,7 @@
           <a:p>
             <a:r>
               <a:rPr lang="en-US" dirty="0"/>
-              <a:t>Notas: Fecha a mini-aula antes da demonstração. Este pacote de três passos é o roteiro exato que será repetido na demonstração e nos dois estúdios do dia.
-[!FIGURA]
-Objetivo didático: um diagrama visual (substituindo o antigo fluxo de três canais da Semana 7) mostrando os três passos — Refinar → Exportar quatro mapas → Conectar — com destaque para o Normal como novidade da semana.
-Como produzir: regenerar o mermaid do pipeline da aula com os quatro mapas explícitos (Albedo, Roughness, Metallic, Normal) e publicar como assets/mermaid-3.png; até lá, apresentar esta etapa apenas com a lista acima.</a:t>
+              <a:t>Notas: Manter o ritmo desta mini aula curto — o conteúdo novo real é o SSS e a lógica de combinação de camadas; o resto é consolidação. Priorizar tempo de demonstração e estúdio.</a:t>
             </a:r>
             <a:endParaRPr lang="en-US" dirty="0"/>
           </a:p>
@@ -1934,7 +2287,7 @@
           <a:p>
             <a:r>
               <a:rPr lang="en-US" dirty="0"/>
-              <a:t>Notas: Passo 1 da demonstração / Etapa 1 do Estúdio 1. A camada de detalhe precisa concordar com a máscara de baixo, não competir com ela — se as duas contarem histórias diferentes de desgaste, o material perde coerência.</a:t>
+              <a:t>Notas: Amarrar a C4 (Materiais PBR) e C5 (Texturização) — critérios centrais da CF2 de hoje.</a:t>
             </a:r>
             <a:endParaRPr lang="en-US" dirty="0"/>
           </a:p>
@@ -2634,9 +2987,165 @@
 </p:sld>
 </file>
 
+<file path=ppt/slides/slide18.xml><?xml version="1.0" encoding="utf-8"?>
+<p:sld xmlns:a="http://schemas.openxmlformats.org/drawingml/2006/main" xmlns:r="http://schemas.openxmlformats.org/officeDocument/2006/relationships" xmlns:p="http://schemas.openxmlformats.org/presentationml/2006/main">
+  <p:cSld name="Slide 18">
+    <p:bg>
+      <p:bgPr>
+        <a:blipFill dpi="0" rotWithShape="1">
+          <a:blip r:embed="rId1">
+            <a:lum/>
+          </a:blip>
+          <a:srcRect/>
+          <a:stretch>
+            <a:fillRect/>
+          </a:stretch>
+        </a:blipFill>
+        <a:effectLst/>
+      </p:bgPr>
+    </p:bg>
+    <p:spTree>
+      <p:nvGrpSpPr>
+        <p:cNvPr id="1" name=""/>
+        <p:cNvGrpSpPr/>
+        <p:nvPr/>
+      </p:nvGrpSpPr>
+      <p:grpSpPr>
+        <a:xfrm>
+          <a:off x="0" y="0"/>
+          <a:ext cx="0" cy="0"/>
+          <a:chOff x="0" y="0"/>
+          <a:chExt cx="0" cy="0"/>
+        </a:xfrm>
+      </p:grpSpPr>
+    </p:spTree>
+  </p:cSld>
+  <p:clrMapOvr>
+    <a:masterClrMapping/>
+  </p:clrMapOvr>
+</p:sld>
+</file>
+
+<file path=ppt/slides/slide19.xml><?xml version="1.0" encoding="utf-8"?>
+<p:sld xmlns:a="http://schemas.openxmlformats.org/drawingml/2006/main" xmlns:r="http://schemas.openxmlformats.org/officeDocument/2006/relationships" xmlns:p="http://schemas.openxmlformats.org/presentationml/2006/main">
+  <p:cSld name="Slide 19">
+    <p:bg>
+      <p:bgPr>
+        <a:blipFill dpi="0" rotWithShape="1">
+          <a:blip r:embed="rId1">
+            <a:lum/>
+          </a:blip>
+          <a:srcRect/>
+          <a:stretch>
+            <a:fillRect/>
+          </a:stretch>
+        </a:blipFill>
+        <a:effectLst/>
+      </p:bgPr>
+    </p:bg>
+    <p:spTree>
+      <p:nvGrpSpPr>
+        <p:cNvPr id="1" name=""/>
+        <p:cNvGrpSpPr/>
+        <p:nvPr/>
+      </p:nvGrpSpPr>
+      <p:grpSpPr>
+        <a:xfrm>
+          <a:off x="0" y="0"/>
+          <a:ext cx="0" cy="0"/>
+          <a:chOff x="0" y="0"/>
+          <a:chExt cx="0" cy="0"/>
+        </a:xfrm>
+      </p:grpSpPr>
+    </p:spTree>
+  </p:cSld>
+  <p:clrMapOvr>
+    <a:masterClrMapping/>
+  </p:clrMapOvr>
+</p:sld>
+</file>
+
 <file path=ppt/slides/slide2.xml><?xml version="1.0" encoding="utf-8"?>
 <p:sld xmlns:a="http://schemas.openxmlformats.org/drawingml/2006/main" xmlns:r="http://schemas.openxmlformats.org/officeDocument/2006/relationships" xmlns:p="http://schemas.openxmlformats.org/presentationml/2006/main">
   <p:cSld name="Slide 2">
+    <p:bg>
+      <p:bgPr>
+        <a:blipFill dpi="0" rotWithShape="1">
+          <a:blip r:embed="rId1">
+            <a:lum/>
+          </a:blip>
+          <a:srcRect/>
+          <a:stretch>
+            <a:fillRect/>
+          </a:stretch>
+        </a:blipFill>
+        <a:effectLst/>
+      </p:bgPr>
+    </p:bg>
+    <p:spTree>
+      <p:nvGrpSpPr>
+        <p:cNvPr id="1" name=""/>
+        <p:cNvGrpSpPr/>
+        <p:nvPr/>
+      </p:nvGrpSpPr>
+      <p:grpSpPr>
+        <a:xfrm>
+          <a:off x="0" y="0"/>
+          <a:ext cx="0" cy="0"/>
+          <a:chOff x="0" y="0"/>
+          <a:chExt cx="0" cy="0"/>
+        </a:xfrm>
+      </p:grpSpPr>
+    </p:spTree>
+  </p:cSld>
+  <p:clrMapOvr>
+    <a:masterClrMapping/>
+  </p:clrMapOvr>
+</p:sld>
+</file>
+
+<file path=ppt/slides/slide20.xml><?xml version="1.0" encoding="utf-8"?>
+<p:sld xmlns:a="http://schemas.openxmlformats.org/drawingml/2006/main" xmlns:r="http://schemas.openxmlformats.org/officeDocument/2006/relationships" xmlns:p="http://schemas.openxmlformats.org/presentationml/2006/main">
+  <p:cSld name="Slide 20">
+    <p:bg>
+      <p:bgPr>
+        <a:blipFill dpi="0" rotWithShape="1">
+          <a:blip r:embed="rId1">
+            <a:lum/>
+          </a:blip>
+          <a:srcRect/>
+          <a:stretch>
+            <a:fillRect/>
+          </a:stretch>
+        </a:blipFill>
+        <a:effectLst/>
+      </p:bgPr>
+    </p:bg>
+    <p:spTree>
+      <p:nvGrpSpPr>
+        <p:cNvPr id="1" name=""/>
+        <p:cNvGrpSpPr/>
+        <p:nvPr/>
+      </p:nvGrpSpPr>
+      <p:grpSpPr>
+        <a:xfrm>
+          <a:off x="0" y="0"/>
+          <a:ext cx="0" cy="0"/>
+          <a:chOff x="0" y="0"/>
+          <a:chExt cx="0" cy="0"/>
+        </a:xfrm>
+      </p:grpSpPr>
+    </p:spTree>
+  </p:cSld>
+  <p:clrMapOvr>
+    <a:masterClrMapping/>
+  </p:clrMapOvr>
+</p:sld>
+</file>
+
+<file path=ppt/slides/slide21.xml><?xml version="1.0" encoding="utf-8"?>
+<p:sld xmlns:a="http://schemas.openxmlformats.org/drawingml/2006/main" xmlns:r="http://schemas.openxmlformats.org/officeDocument/2006/relationships" xmlns:p="http://schemas.openxmlformats.org/presentationml/2006/main">
+  <p:cSld name="Slide 21">
     <p:bg>
       <p:bgPr>
         <a:blipFill dpi="0" rotWithShape="1">
